--- a/decks/hist-british-empire-india/hist-british-empire-india_ch3_uprising-1857.pptx
+++ b/decks/hist-british-empire-india/hist-british-empire-india_ch3_uprising-1857.pptx
@@ -128,31 +128,31 @@
   <p:extLst>
     <p:ext uri="{521415D9-36F7-43E2-AB2F-B90AF26B5E84}">
       <p14:sectionLst xmlns:p14="http://schemas.microsoft.com/office/powerpoint/2010/main">
-        <p14:section name="Opening" id="{3aa96d23-74e8-23c7-d431-fdcc2c3dd419}">
+        <p14:section name="Opening" id="{87a63122-eded-f4bf-d67e-0fc9d2d479b5}">
           <p14:sldIdLst>
             <p14:sldId id="256"/>
           </p14:sldIdLst>
         </p14:section>
-        <p14:section name="Gate" id="{eb0deb9e-3fed-63a5-f6af-95f7c842a9bf}">
+        <p14:section name="Gate" id="{00bee893-51a7-7e66-6efb-1f885e637cdd}">
           <p14:sldIdLst>
             <p14:sldId id="257"/>
             <p14:sldId id="258"/>
             <p14:sldId id="259"/>
           </p14:sldIdLst>
         </p14:section>
-        <p14:section name="Pre-teach" id="{52e552c3-3d73-853c-3c70-1d6c34f5f9e4}">
+        <p14:section name="Pre-teach" id="{6319ed80-276a-abff-4bdf-0246f52b1e71}">
           <p14:sldIdLst>
             <p14:sldId id="260"/>
             <p14:sldId id="261"/>
           </p14:sldIdLst>
         </p14:section>
-        <p14:section name="Read-along" id="{9d660a60-76b7-5ae4-4c54-62722b18edd0}">
+        <p14:section name="Read-along" id="{1f1dba73-9049-8048-703c-f6ced567e3cd}">
           <p14:sldIdLst>
             <p14:sldId id="262"/>
             <p14:sldId id="263"/>
           </p14:sldIdLst>
         </p14:section>
-        <p14:section name="Teach" id="{cc4f69d0-e06d-e809-2bba-dc5da6c786bc}">
+        <p14:section name="Teach" id="{7455fc06-1a4d-9083-c798-9e0eb63b9a1a}">
           <p14:sldIdLst>
             <p14:sldId id="264"/>
             <p14:sldId id="265"/>
@@ -162,7 +162,7 @@
             <p14:sldId id="269"/>
           </p14:sldIdLst>
         </p14:section>
-        <p14:section name="Routes" id="{59853d22-4397-ae2d-0ff8-5c83ca299926}">
+        <p14:section name="Routes" id="{81b70050-4cbd-ad13-cc5e-b3806f86eb7a}">
           <p14:sldIdLst>
             <p14:sldId id="270"/>
             <p14:sldId id="271"/>
@@ -170,12 +170,12 @@
             <p14:sldId id="273"/>
           </p14:sldIdLst>
         </p14:section>
-        <p14:section name="Close" id="{18750628-3f22-2334-10f2-ae173ea525d8}">
+        <p14:section name="Close" id="{20b754f5-3edf-a439-1bc3-491ec4864ced}">
           <p14:sldIdLst>
             <p14:sldId id="274"/>
           </p14:sldIdLst>
         </p14:section>
-        <p14:section name="Answers" id="{90e33a88-ae1d-b6c5-e57d-93f852662835}">
+        <p14:section name="Answers" id="{05527b3a-4538-a0b6-f4ab-cef7676958d0}">
           <p14:sldIdLst>
             <p14:sldId id="275"/>
             <p14:sldId id="276"/>
